--- a/exports/royal_spin_ab_test.pptx
+++ b/exports/royal_spin_ab_test.pptx
@@ -3484,7 +3484,7 @@
                 </a:solidFill>
                 <a:latin typeface="Calibri"/>
               </a:rPr>
-              <a:t>+40%</a:t>
+              <a:t>+16%</a:t>
             </a:r>
           </a:p>
         </p:txBody>
@@ -3519,7 +3519,7 @@
                 </a:solidFill>
                 <a:latin typeface="Calibri"/>
               </a:rPr>
-              <a:t>$16.56  →  $23.17</a:t>
+              <a:t>$15.67  →  $18.18</a:t>
             </a:r>
           </a:p>
         </p:txBody>
@@ -3853,7 +3853,7 @@
                 </a:solidFill>
                 <a:latin typeface="Calibri"/>
               </a:rPr>
-              <a:t>Headline Result — ARPU +40%</a:t>
+              <a:t>Headline Result — ARPU +16%</a:t>
             </a:r>
           </a:p>
         </p:txBody>
@@ -5590,7 +5590,7 @@
                 </a:solidFill>
                 <a:latin typeface="Calibri"/>
               </a:rPr>
-              <a:t>Headline Result — ARPU +40%</a:t>
+              <a:t>Headline Result — ARPU +16%</a:t>
             </a:r>
           </a:p>
         </p:txBody>
@@ -5740,7 +5740,7 @@
                 </a:solidFill>
                 <a:latin typeface="Calibri"/>
               </a:rPr>
-              <a:t>$23.17</a:t>
+              <a:t>$18.18</a:t>
             </a:r>
           </a:p>
         </p:txBody>
@@ -5775,7 +5775,7 @@
                 </a:solidFill>
                 <a:latin typeface="Calibri"/>
               </a:rPr>
-              <a:t>▲ +40%  vs $16.56</a:t>
+              <a:t>▲ +16%  vs $15.67</a:t>
             </a:r>
           </a:p>
         </p:txBody>
@@ -5890,7 +5890,7 @@
                 </a:solidFill>
                 <a:latin typeface="Calibri"/>
               </a:rPr>
-              <a:t>19.23%</a:t>
+              <a:t>26.59%</a:t>
             </a:r>
           </a:p>
         </p:txBody>
@@ -5921,11 +5921,11 @@
             <a:r>
               <a:rPr sz="1300" b="1">
                 <a:solidFill>
-                  <a:srgbClr val="2ECC71"/>
-                </a:solidFill>
-                <a:latin typeface="Calibri"/>
-              </a:rPr>
-              <a:t>▲ +0.91pp  vs 18.32%</a:t>
+                  <a:srgbClr val="E74C3C"/>
+                </a:solidFill>
+                <a:latin typeface="Calibri"/>
+              </a:rPr>
+              <a:t>▼ -0.12pp  vs 26.71%</a:t>
             </a:r>
           </a:p>
         </p:txBody>
@@ -6040,7 +6040,7 @@
                 </a:solidFill>
                 <a:latin typeface="Calibri"/>
               </a:rPr>
-              <a:t>16.66%</a:t>
+              <a:t>22.53%</a:t>
             </a:r>
           </a:p>
         </p:txBody>
@@ -6075,7 +6075,7 @@
                 </a:solidFill>
                 <a:latin typeface="Calibri"/>
               </a:rPr>
-              <a:t>▲ +0.82pp  vs 15.84%</a:t>
+              <a:t>▲ +0.24pp  vs 22.29%</a:t>
             </a:r>
           </a:p>
         </p:txBody>
@@ -6190,7 +6190,7 @@
                 </a:solidFill>
                 <a:latin typeface="Calibri"/>
               </a:rPr>
-              <a:t>70.77</a:t>
+              <a:t>47.71</a:t>
             </a:r>
           </a:p>
         </p:txBody>
@@ -6221,11 +6221,11 @@
             <a:r>
               <a:rPr sz="1300" b="1">
                 <a:solidFill>
-                  <a:srgbClr val="2ECC71"/>
-                </a:solidFill>
-                <a:latin typeface="Calibri"/>
-              </a:rPr>
-              <a:t>▲ +1.32  vs 69.45</a:t>
+                  <a:srgbClr val="E74C3C"/>
+                </a:solidFill>
+                <a:latin typeface="Calibri"/>
+              </a:rPr>
+              <a:t>▼ -1.98  vs 49.69</a:t>
             </a:r>
           </a:p>
         </p:txBody>
@@ -6521,7 +6521,7 @@
                 </a:solidFill>
                 <a:latin typeface="Calibri"/>
               </a:rPr>
-              <a:t>25.97%</a:t>
+              <a:t>25.63%</a:t>
             </a:r>
           </a:p>
         </p:txBody>
@@ -6556,7 +6556,7 @@
                 </a:solidFill>
                 <a:latin typeface="Calibri"/>
               </a:rPr>
-              <a:t>20.89%</a:t>
+              <a:t>25.00%</a:t>
             </a:r>
           </a:p>
         </p:txBody>
@@ -6591,7 +6591,7 @@
                 </a:solidFill>
                 <a:latin typeface="Calibri"/>
               </a:rPr>
-              <a:t>7.23%</a:t>
+              <a:t>22.34%</a:t>
             </a:r>
           </a:p>
         </p:txBody>
@@ -6704,7 +6704,7 @@
                 </a:solidFill>
                 <a:latin typeface="Calibri"/>
               </a:rPr>
-              <a:t>25.53%</a:t>
+              <a:t>25.73%</a:t>
             </a:r>
           </a:p>
         </p:txBody>
@@ -6739,7 +6739,7 @@
                 </a:solidFill>
                 <a:latin typeface="Calibri"/>
               </a:rPr>
-              <a:t>21.16%</a:t>
+              <a:t>25.57%</a:t>
             </a:r>
           </a:p>
         </p:txBody>
@@ -6774,7 +6774,7 @@
                 </a:solidFill>
                 <a:latin typeface="Calibri"/>
               </a:rPr>
-              <a:t>7.82%</a:t>
+              <a:t>21.98%</a:t>
             </a:r>
           </a:p>
         </p:txBody>
@@ -6924,7 +6924,7 @@
                 </a:solidFill>
                 <a:latin typeface="Calibri"/>
               </a:rPr>
-              <a:t>Treatment players spent 40% more on average than Control, while session engagement remained identical. The ARPU lift is driven purely by monetisation, not playtime inflation.</a:t>
+              <a:t>Treatment players spent 16% more on average than Control, while session engagement remained identical. The ARPU lift is driven purely by monetisation, not playtime inflation.</a:t>
             </a:r>
           </a:p>
         </p:txBody>
@@ -7063,7 +7063,7 @@
                 </a:solidFill>
                 <a:latin typeface="Calibri"/>
               </a:rPr>
-              <a:t>8.39% of Treatment players adopted Royal Tokens — and contributed 23% of all Treatment revenue</a:t>
+              <a:t>10.61% of Treatment players adopted Royal Tokens — and contributed 23% of all Treatment revenue</a:t>
             </a:r>
           </a:p>
         </p:txBody>
@@ -7178,7 +7178,7 @@
                 </a:solidFill>
                 <a:latin typeface="Calibri"/>
               </a:rPr>
-              <a:t>8.39%</a:t>
+              <a:t>10.61%</a:t>
             </a:r>
           </a:p>
         </p:txBody>
@@ -7326,7 +7326,7 @@
                 </a:solidFill>
                 <a:latin typeface="Calibri"/>
               </a:rPr>
-              <a:t>$55,419</a:t>
+              <a:t>$48,462</a:t>
             </a:r>
           </a:p>
         </p:txBody>
@@ -7490,7 +7490,7 @@
         <p:spPr>
           <a:xfrm>
             <a:off x="6309360" y="2176272"/>
-            <a:ext cx="3790224" cy="502920"/>
+            <a:ext cx="3807012" cy="502920"/>
           </a:xfrm>
           <a:prstGeom prst="rect">
             <a:avLst/>
@@ -7532,7 +7532,7 @@
         </p:nvSpPr>
         <p:spPr>
           <a:xfrm>
-            <a:off x="10191024" y="2176272"/>
+            <a:off x="10207812" y="2176272"/>
             <a:ext cx="1371600" cy="502920"/>
           </a:xfrm>
           <a:prstGeom prst="rect">
@@ -7554,7 +7554,7 @@
                 </a:solidFill>
                 <a:latin typeface="Calibri"/>
               </a:rPr>
-              <a:t>76.76%  $183,089</a:t>
+              <a:t>77.1%  $163,129</a:t>
             </a:r>
           </a:p>
         </p:txBody>
@@ -7603,7 +7603,7 @@
         <p:spPr>
           <a:xfrm>
             <a:off x="6309360" y="3822192"/>
-            <a:ext cx="1147535" cy="502920"/>
+            <a:ext cx="1130747" cy="502920"/>
           </a:xfrm>
           <a:prstGeom prst="rect">
             <a:avLst/>
@@ -7645,7 +7645,7 @@
         </p:nvSpPr>
         <p:spPr>
           <a:xfrm>
-            <a:off x="7548335" y="3822192"/>
+            <a:off x="7531547" y="3822192"/>
             <a:ext cx="1371600" cy="502920"/>
           </a:xfrm>
           <a:prstGeom prst="rect">
@@ -7667,7 +7667,7 @@
                 </a:solidFill>
                 <a:latin typeface="Calibri"/>
               </a:rPr>
-              <a:t>23.24%  $55,419</a:t>
+              <a:t>22.9%  $48,462</a:t>
             </a:r>
           </a:p>
         </p:txBody>
@@ -7702,7 +7702,7 @@
                 </a:solidFill>
                 <a:latin typeface="Calibri"/>
               </a:rPr>
-              <a:t>Total Treatment Revenue: $238,508</a:t>
+              <a:t>Total Treatment Revenue: $211,591</a:t>
             </a:r>
           </a:p>
         </p:txBody>
@@ -8287,7 +8287,7 @@
                 </a:solidFill>
                 <a:latin typeface="Calibri"/>
               </a:rPr>
-              <a:t>$414.30</a:t>
+              <a:t>$424.05</a:t>
             </a:r>
           </a:p>
         </p:txBody>
@@ -8322,7 +8322,7 @@
                 </a:solidFill>
                 <a:latin typeface="Calibri"/>
               </a:rPr>
-              <a:t>$557.38</a:t>
+              <a:t>$550.86</a:t>
             </a:r>
           </a:p>
         </p:txBody>
@@ -8357,7 +8357,7 @@
                 </a:solidFill>
                 <a:latin typeface="Calibri"/>
               </a:rPr>
-              <a:t>+34.5%</a:t>
+              <a:t>+29.9%</a:t>
             </a:r>
           </a:p>
         </p:txBody>
@@ -8505,7 +8505,7 @@
                 </a:solidFill>
                 <a:latin typeface="Calibri"/>
               </a:rPr>
-              <a:t>$18.56</a:t>
+              <a:t>$21.06</a:t>
             </a:r>
           </a:p>
         </p:txBody>
@@ -8540,7 +8540,7 @@
                 </a:solidFill>
                 <a:latin typeface="Calibri"/>
               </a:rPr>
-              <a:t>$15.02</a:t>
+              <a:t>$18.83</a:t>
             </a:r>
           </a:p>
         </p:txBody>
@@ -8571,11 +8571,11 @@
             <a:r>
               <a:rPr sz="1300" b="0">
                 <a:solidFill>
-                  <a:srgbClr val="E74C3C"/>
-                </a:solidFill>
-                <a:latin typeface="Calibri"/>
-              </a:rPr>
-              <a:t>-19.1%</a:t>
+                  <a:srgbClr val="F39C12"/>
+                </a:solidFill>
+                <a:latin typeface="Calibri"/>
+              </a:rPr>
+              <a:t>-10.6%</a:t>
             </a:r>
           </a:p>
         </p:txBody>
@@ -8723,7 +8723,7 @@
                 </a:solidFill>
                 <a:latin typeface="Calibri"/>
               </a:rPr>
-              <a:t>$0.38</a:t>
+              <a:t>$0.86</a:t>
             </a:r>
           </a:p>
         </p:txBody>
@@ -8758,7 +8758,7 @@
                 </a:solidFill>
                 <a:latin typeface="Calibri"/>
               </a:rPr>
-              <a:t>$0.34</a:t>
+              <a:t>$0.77</a:t>
             </a:r>
           </a:p>
         </p:txBody>
@@ -9083,7 +9083,7 @@
                 </a:solidFill>
                 <a:latin typeface="Calibri"/>
               </a:rPr>
-              <a:t>$15,512</a:t>
+              <a:t>$18,600</a:t>
             </a:r>
           </a:p>
         </p:txBody>
@@ -9188,7 +9188,7 @@
                 </a:solidFill>
                 <a:latin typeface="Calibri"/>
               </a:rPr>
-              <a:t>$9,704</a:t>
+              <a:t>$11,424</a:t>
             </a:r>
           </a:p>
         </p:txBody>
@@ -9223,7 +9223,7 @@
                 </a:solidFill>
                 <a:latin typeface="Calibri"/>
               </a:rPr>
-              <a:t>$3,905</a:t>
+              <a:t>$4,244</a:t>
             </a:r>
           </a:p>
         </p:txBody>
@@ -9293,7 +9293,7 @@
                 </a:solidFill>
                 <a:latin typeface="Calibri"/>
               </a:rPr>
-              <a:t>-$5,808</a:t>
+              <a:t>$-7,176</a:t>
             </a:r>
           </a:p>
         </p:txBody>
@@ -9328,7 +9328,7 @@
                 </a:solidFill>
                 <a:latin typeface="Calibri"/>
               </a:rPr>
-              <a:t>+$3,905  =  -$1,903 net loss</a:t>
+              <a:t>+$4,244  =  $2,932 net loss</a:t>
             </a:r>
           </a:p>
         </p:txBody>
@@ -9443,7 +9443,7 @@
                 </a:solidFill>
                 <a:latin typeface="Calibri"/>
               </a:rPr>
-              <a:t>Control:    88.8% of group revenue from Whales</a:t>
+              <a:t>Control:    85.0% of group revenue from Whales</a:t>
             </a:r>
           </a:p>
         </p:txBody>
@@ -9478,7 +9478,7 @@
                 </a:solidFill>
                 <a:latin typeface="Calibri"/>
               </a:rPr>
-              <a:t>Treatment:  93.0% of group revenue from Whales</a:t>
+              <a:t>Treatment:  88.8% of group revenue from Whales</a:t>
             </a:r>
           </a:p>
         </p:txBody>
@@ -9926,7 +9926,7 @@
                 </a:solidFill>
                 <a:latin typeface="Calibri"/>
               </a:rPr>
-              <a:t>$17.65</a:t>
+              <a:t>$17.03</a:t>
             </a:r>
           </a:p>
         </p:txBody>
@@ -9996,7 +9996,7 @@
                 </a:solidFill>
                 <a:latin typeface="Calibri"/>
               </a:rPr>
-              <a:t>$28.08</a:t>
+              <a:t>$22.08</a:t>
             </a:r>
           </a:p>
         </p:txBody>
@@ -10074,7 +10074,7 @@
                 </a:solidFill>
                 <a:latin typeface="Calibri"/>
               </a:rPr>
-              <a:t>+59.1%</a:t>
+              <a:t>+30%</a:t>
             </a:r>
           </a:p>
         </p:txBody>
@@ -10267,7 +10267,7 @@
                 </a:solidFill>
                 <a:latin typeface="Calibri"/>
               </a:rPr>
-              <a:t>$15.09</a:t>
+              <a:t>$13.76</a:t>
             </a:r>
           </a:p>
         </p:txBody>
@@ -10337,7 +10337,7 @@
                 </a:solidFill>
                 <a:latin typeface="Calibri"/>
               </a:rPr>
-              <a:t>$16.46</a:t>
+              <a:t>$12.69</a:t>
             </a:r>
           </a:p>
         </p:txBody>
@@ -10415,7 +10415,7 @@
                 </a:solidFill>
                 <a:latin typeface="Calibri"/>
               </a:rPr>
-              <a:t>+9.1%</a:t>
+              <a:t>+-8%</a:t>
             </a:r>
           </a:p>
         </p:txBody>
@@ -10495,7 +10495,7 @@
                 </a:solidFill>
                 <a:latin typeface="Calibri"/>
               </a:rPr>
-              <a:t>iOS players responded 6.5× more strongly to the Royal Spin feature than Android players. Prioritise iOS in rollout targeting and marketing spend.</a:t>
+              <a:t>iOS players responded -4x more strongly to the Royal Spin feature than Android players. Prioritise iOS in rollout targeting and marketing spend.</a:t>
             </a:r>
           </a:p>
         </p:txBody>
@@ -10825,7 +10825,7 @@
                 </a:solidFill>
                 <a:latin typeface="Calibri"/>
               </a:rPr>
-              <a:t>25.53% T  vs  25.97% C</a:t>
+              <a:t>25.73% T  vs  25.63% C</a:t>
             </a:r>
           </a:p>
         </p:txBody>
@@ -11051,7 +11051,7 @@
                 </a:solidFill>
                 <a:latin typeface="Calibri"/>
               </a:rPr>
-              <a:t>21.16% T  vs  20.89% C</a:t>
+              <a:t>25.57% T  vs  25.00% C</a:t>
             </a:r>
           </a:p>
         </p:txBody>
@@ -11277,7 +11277,7 @@
                 </a:solidFill>
                 <a:latin typeface="Calibri"/>
               </a:rPr>
-              <a:t>7.82% T  vs  7.23% C</a:t>
+              <a:t>21.98% T  vs  22.34% C</a:t>
             </a:r>
           </a:p>
         </p:txBody>
@@ -11312,7 +11312,7 @@
                 </a:solidFill>
                 <a:latin typeface="Calibri"/>
               </a:rPr>
-              <a:t>Slight positive trend</a:t>
+              <a:t>Slight dip — monitor</a:t>
             </a:r>
           </a:p>
         </p:txBody>
@@ -11503,7 +11503,7 @@
                 </a:solidFill>
                 <a:latin typeface="Calibri"/>
               </a:rPr>
-              <a:t>5.4 T  vs  5.2 C</a:t>
+              <a:t>10.8 T  vs  10.8 C</a:t>
             </a:r>
           </a:p>
         </p:txBody>
@@ -11729,7 +11729,7 @@
                 </a:solidFill>
                 <a:latin typeface="Calibri"/>
               </a:rPr>
-              <a:t>70.77 T  vs  69.45 C</a:t>
+              <a:t>47.71 T  vs  49.69 C</a:t>
             </a:r>
           </a:p>
         </p:txBody>
@@ -11955,7 +11955,7 @@
                 </a:solidFill>
                 <a:latin typeface="Calibri"/>
               </a:rPr>
-              <a:t>$15.02 T  vs  $18.56 C</a:t>
+              <a:t>$18.83 T  vs  $21.06 C</a:t>
             </a:r>
           </a:p>
         </p:txBody>
@@ -12181,7 +12181,7 @@
                 </a:solidFill>
                 <a:latin typeface="Calibri"/>
               </a:rPr>
-              <a:t>93.0% T  vs  88.8% C</a:t>
+              <a:t>88.8% T  vs  85.0% C</a:t>
             </a:r>
           </a:p>
         </p:txBody>
@@ -12548,7 +12548,7 @@
                 </a:solidFill>
                 <a:latin typeface="Calibri"/>
               </a:rPr>
-              <a:t>VERDICT:  SHIP  —  Royal Spin delivers a statistically meaningful +40% ARPU lift with no engagement cost</a:t>
+              <a:t>VERDICT:  SHIP  —  Royal Spin delivers a statistically meaningful +16% ARPU lift with no engagement cost</a:t>
             </a:r>
           </a:p>
         </p:txBody>
@@ -12741,7 +12741,7 @@
                 </a:solidFill>
                 <a:latin typeface="Calibri"/>
               </a:rPr>
-              <a:t>•  Strongest signal group: iOS Whales saw +59% ARPU and +34% segment ARPU</a:t>
+              <a:t>•  Strongest signal: iOS Whales saw +30% ARPU and +30% segment ARPU</a:t>
             </a:r>
           </a:p>
         </p:txBody>
@@ -12811,7 +12811,7 @@
                 </a:solidFill>
                 <a:latin typeface="Calibri"/>
               </a:rPr>
-              <a:t>•  8.39% Royal Token adoption rate driving 23% of Treatment revenue</a:t>
+              <a:t>•  10.61% Royal Token adoption driving 23% of Treatment revenue</a:t>
             </a:r>
           </a:p>
         </p:txBody>
@@ -13039,7 +13039,7 @@
                 </a:solidFill>
                 <a:latin typeface="Calibri"/>
               </a:rPr>
-              <a:t>•  Net Dolphin loss: -$1,903 across the experiment cohort</a:t>
+              <a:t>•  Net Dolphin loss: $2,932 across the experiment cohort</a:t>
             </a:r>
           </a:p>
         </p:txBody>
@@ -13267,7 +13267,7 @@
                 </a:solidFill>
                 <a:latin typeface="Calibri"/>
               </a:rPr>
-              <a:t>•  Treatment revenue is 93% Whale-dependent vs 88.8% in Control</a:t>
+              <a:t>•  Treatment revenue is 88.8% Whale-dependent vs 85.0% in Control</a:t>
             </a:r>
           </a:p>
         </p:txBody>
@@ -13337,7 +13337,7 @@
                 </a:solidFill>
                 <a:latin typeface="Calibri"/>
               </a:rPr>
-              <a:t>•  Review Android performance separately — only +9% ARPU lift</a:t>
+              <a:t>•  Review Android performance separately — only +-8% ARPU lift</a:t>
             </a:r>
           </a:p>
         </p:txBody>

--- a/exports/royal_spin_ab_test.pptx
+++ b/exports/royal_spin_ab_test.pptx
@@ -3484,7 +3484,7 @@
                 </a:solidFill>
                 <a:latin typeface="Calibri"/>
               </a:rPr>
-              <a:t>+16%</a:t>
+              <a:t>+10%</a:t>
             </a:r>
           </a:p>
         </p:txBody>
@@ -3519,7 +3519,7 @@
                 </a:solidFill>
                 <a:latin typeface="Calibri"/>
               </a:rPr>
-              <a:t>$15.67  →  $18.18</a:t>
+              <a:t>$14.08  →  $15.43</a:t>
             </a:r>
           </a:p>
         </p:txBody>
@@ -3853,7 +3853,7 @@
                 </a:solidFill>
                 <a:latin typeface="Calibri"/>
               </a:rPr>
-              <a:t>Headline Result — ARPU +16%</a:t>
+              <a:t>Headline Result — ARPU +10%</a:t>
             </a:r>
           </a:p>
         </p:txBody>
@@ -5590,7 +5590,7 @@
                 </a:solidFill>
                 <a:latin typeface="Calibri"/>
               </a:rPr>
-              <a:t>Headline Result — ARPU +16%</a:t>
+              <a:t>Headline Result — ARPU +10%</a:t>
             </a:r>
           </a:p>
         </p:txBody>
@@ -5740,7 +5740,7 @@
                 </a:solidFill>
                 <a:latin typeface="Calibri"/>
               </a:rPr>
-              <a:t>$18.18</a:t>
+              <a:t>$15.43</a:t>
             </a:r>
           </a:p>
         </p:txBody>
@@ -5775,7 +5775,7 @@
                 </a:solidFill>
                 <a:latin typeface="Calibri"/>
               </a:rPr>
-              <a:t>▲ +16%  vs $15.67</a:t>
+              <a:t>▲ +10%  vs $14.08</a:t>
             </a:r>
           </a:p>
         </p:txBody>
@@ -5890,7 +5890,7 @@
                 </a:solidFill>
                 <a:latin typeface="Calibri"/>
               </a:rPr>
-              <a:t>26.59%</a:t>
+              <a:t>3.79%</a:t>
             </a:r>
           </a:p>
         </p:txBody>
@@ -5925,7 +5925,7 @@
                 </a:solidFill>
                 <a:latin typeface="Calibri"/>
               </a:rPr>
-              <a:t>▼ -0.12pp  vs 26.71%</a:t>
+              <a:t>▼ -0.10pp  vs 3.89%</a:t>
             </a:r>
           </a:p>
         </p:txBody>
@@ -6040,7 +6040,7 @@
                 </a:solidFill>
                 <a:latin typeface="Calibri"/>
               </a:rPr>
-              <a:t>22.53%</a:t>
+              <a:t>3.11%</a:t>
             </a:r>
           </a:p>
         </p:txBody>
@@ -6075,7 +6075,7 @@
                 </a:solidFill>
                 <a:latin typeface="Calibri"/>
               </a:rPr>
-              <a:t>▲ +0.24pp  vs 22.29%</a:t>
+              <a:t>▲ +0.13pp  vs 2.98%</a:t>
             </a:r>
           </a:p>
         </p:txBody>
@@ -6190,7 +6190,7 @@
                 </a:solidFill>
                 <a:latin typeface="Calibri"/>
               </a:rPr>
-              <a:t>47.71</a:t>
+              <a:t>49.92</a:t>
             </a:r>
           </a:p>
         </p:txBody>
@@ -6221,11 +6221,11 @@
             <a:r>
               <a:rPr sz="1300" b="1">
                 <a:solidFill>
-                  <a:srgbClr val="E74C3C"/>
-                </a:solidFill>
-                <a:latin typeface="Calibri"/>
-              </a:rPr>
-              <a:t>▼ -1.98  vs 49.69</a:t>
+                  <a:srgbClr val="2ECC71"/>
+                </a:solidFill>
+                <a:latin typeface="Calibri"/>
+              </a:rPr>
+              <a:t>▲ +0.20  vs 49.72</a:t>
             </a:r>
           </a:p>
         </p:txBody>
@@ -6521,7 +6521,7 @@
                 </a:solidFill>
                 <a:latin typeface="Calibri"/>
               </a:rPr>
-              <a:t>25.63%</a:t>
+              <a:t>25.11%</a:t>
             </a:r>
           </a:p>
         </p:txBody>
@@ -6556,7 +6556,7 @@
                 </a:solidFill>
                 <a:latin typeface="Calibri"/>
               </a:rPr>
-              <a:t>25.00%</a:t>
+              <a:t>24.90%</a:t>
             </a:r>
           </a:p>
         </p:txBody>
@@ -6591,7 +6591,7 @@
                 </a:solidFill>
                 <a:latin typeface="Calibri"/>
               </a:rPr>
-              <a:t>22.34%</a:t>
+              <a:t>22.15%</a:t>
             </a:r>
           </a:p>
         </p:txBody>
@@ -6704,7 +6704,7 @@
                 </a:solidFill>
                 <a:latin typeface="Calibri"/>
               </a:rPr>
-              <a:t>25.73%</a:t>
+              <a:t>24.94%</a:t>
             </a:r>
           </a:p>
         </p:txBody>
@@ -6739,7 +6739,7 @@
                 </a:solidFill>
                 <a:latin typeface="Calibri"/>
               </a:rPr>
-              <a:t>25.57%</a:t>
+              <a:t>25.90%</a:t>
             </a:r>
           </a:p>
         </p:txBody>
@@ -6774,7 +6774,7 @@
                 </a:solidFill>
                 <a:latin typeface="Calibri"/>
               </a:rPr>
-              <a:t>21.98%</a:t>
+              <a:t>21.78%</a:t>
             </a:r>
           </a:p>
         </p:txBody>
@@ -6924,7 +6924,7 @@
                 </a:solidFill>
                 <a:latin typeface="Calibri"/>
               </a:rPr>
-              <a:t>Treatment players spent 16% more on average than Control, while session engagement remained identical. The ARPU lift is driven purely by monetisation, not playtime inflation.</a:t>
+              <a:t>Treatment players spent 10% more on average than Control, while session engagement remained identical. The ARPU lift is driven purely by monetisation, not playtime inflation.</a:t>
             </a:r>
           </a:p>
         </p:txBody>
@@ -7063,7 +7063,7 @@
                 </a:solidFill>
                 <a:latin typeface="Calibri"/>
               </a:rPr>
-              <a:t>10.61% of Treatment players adopted Royal Tokens — and contributed 23% of all Treatment revenue</a:t>
+              <a:t>2.00% of Treatment players adopted Royal Tokens — and contributed 15% of all Treatment revenue</a:t>
             </a:r>
           </a:p>
         </p:txBody>
@@ -7178,7 +7178,7 @@
                 </a:solidFill>
                 <a:latin typeface="Calibri"/>
               </a:rPr>
-              <a:t>10.61%</a:t>
+              <a:t>2.00%</a:t>
             </a:r>
           </a:p>
         </p:txBody>
@@ -7326,7 +7326,7 @@
                 </a:solidFill>
                 <a:latin typeface="Calibri"/>
               </a:rPr>
-              <a:t>$48,462</a:t>
+              <a:t>$26,896</a:t>
             </a:r>
           </a:p>
         </p:txBody>
@@ -7490,7 +7490,7 @@
         <p:spPr>
           <a:xfrm>
             <a:off x="6309360" y="2176272"/>
-            <a:ext cx="3807012" cy="502920"/>
+            <a:ext cx="4196602" cy="502920"/>
           </a:xfrm>
           <a:prstGeom prst="rect">
             <a:avLst/>
@@ -7532,7 +7532,7 @@
         </p:nvSpPr>
         <p:spPr>
           <a:xfrm>
-            <a:off x="10207812" y="2176272"/>
+            <a:off x="10597402" y="2176272"/>
             <a:ext cx="1371600" cy="502920"/>
           </a:xfrm>
           <a:prstGeom prst="rect">
@@ -7554,7 +7554,7 @@
                 </a:solidFill>
                 <a:latin typeface="Calibri"/>
               </a:rPr>
-              <a:t>77.1%  $163,129</a:t>
+              <a:t>85.0%  $152,294</a:t>
             </a:r>
           </a:p>
         </p:txBody>
@@ -7603,7 +7603,7 @@
         <p:spPr>
           <a:xfrm>
             <a:off x="6309360" y="3822192"/>
-            <a:ext cx="1130747" cy="502920"/>
+            <a:ext cx="741157" cy="502920"/>
           </a:xfrm>
           <a:prstGeom prst="rect">
             <a:avLst/>
@@ -7645,7 +7645,7 @@
         </p:nvSpPr>
         <p:spPr>
           <a:xfrm>
-            <a:off x="7531547" y="3822192"/>
+            <a:off x="7141957" y="3822192"/>
             <a:ext cx="1371600" cy="502920"/>
           </a:xfrm>
           <a:prstGeom prst="rect">
@@ -7667,7 +7667,7 @@
                 </a:solidFill>
                 <a:latin typeface="Calibri"/>
               </a:rPr>
-              <a:t>22.9%  $48,462</a:t>
+              <a:t>15.0%  $26,896</a:t>
             </a:r>
           </a:p>
         </p:txBody>
@@ -7702,7 +7702,7 @@
                 </a:solidFill>
                 <a:latin typeface="Calibri"/>
               </a:rPr>
-              <a:t>Total Treatment Revenue: $211,591</a:t>
+              <a:t>Total Treatment Revenue: $179,190</a:t>
             </a:r>
           </a:p>
         </p:txBody>
@@ -8287,7 +8287,7 @@
                 </a:solidFill>
                 <a:latin typeface="Calibri"/>
               </a:rPr>
-              <a:t>$424.05</a:t>
+              <a:t>$380.59</a:t>
             </a:r>
           </a:p>
         </p:txBody>
@@ -8322,7 +8322,7 @@
                 </a:solidFill>
                 <a:latin typeface="Calibri"/>
               </a:rPr>
-              <a:t>$550.86</a:t>
+              <a:t>$435.60</a:t>
             </a:r>
           </a:p>
         </p:txBody>
@@ -8357,7 +8357,7 @@
                 </a:solidFill>
                 <a:latin typeface="Calibri"/>
               </a:rPr>
-              <a:t>+29.9%</a:t>
+              <a:t>+14.5%</a:t>
             </a:r>
           </a:p>
         </p:txBody>
@@ -8505,7 +8505,7 @@
                 </a:solidFill>
                 <a:latin typeface="Calibri"/>
               </a:rPr>
-              <a:t>$21.06</a:t>
+              <a:t>$14.26</a:t>
             </a:r>
           </a:p>
         </p:txBody>
@@ -8540,7 +8540,7 @@
                 </a:solidFill>
                 <a:latin typeface="Calibri"/>
               </a:rPr>
-              <a:t>$18.83</a:t>
+              <a:t>$9.99</a:t>
             </a:r>
           </a:p>
         </p:txBody>
@@ -8571,11 +8571,11 @@
             <a:r>
               <a:rPr sz="1300" b="0">
                 <a:solidFill>
-                  <a:srgbClr val="F39C12"/>
-                </a:solidFill>
-                <a:latin typeface="Calibri"/>
-              </a:rPr>
-              <a:t>-10.6%</a:t>
+                  <a:srgbClr val="E74C3C"/>
+                </a:solidFill>
+                <a:latin typeface="Calibri"/>
+              </a:rPr>
+              <a:t>-29.9%</a:t>
             </a:r>
           </a:p>
         </p:txBody>
@@ -8723,7 +8723,7 @@
                 </a:solidFill>
                 <a:latin typeface="Calibri"/>
               </a:rPr>
-              <a:t>$0.86</a:t>
+              <a:t>$0.70</a:t>
             </a:r>
           </a:p>
         </p:txBody>
@@ -8758,7 +8758,7 @@
                 </a:solidFill>
                 <a:latin typeface="Calibri"/>
               </a:rPr>
-              <a:t>$0.77</a:t>
+              <a:t>$0.56</a:t>
             </a:r>
           </a:p>
         </p:txBody>
@@ -8789,11 +8789,11 @@
             <a:r>
               <a:rPr sz="1300" b="0">
                 <a:solidFill>
-                  <a:srgbClr val="F39C12"/>
-                </a:solidFill>
-                <a:latin typeface="Calibri"/>
-              </a:rPr>
-              <a:t>-10.5%</a:t>
+                  <a:srgbClr val="E74C3C"/>
+                </a:solidFill>
+                <a:latin typeface="Calibri"/>
+              </a:rPr>
+              <a:t>-20.0%</a:t>
             </a:r>
           </a:p>
         </p:txBody>
@@ -9083,7 +9083,7 @@
                 </a:solidFill>
                 <a:latin typeface="Calibri"/>
               </a:rPr>
-              <a:t>$18,600</a:t>
+              <a:t>$12,179</a:t>
             </a:r>
           </a:p>
         </p:txBody>
@@ -9188,7 +9188,7 @@
                 </a:solidFill>
                 <a:latin typeface="Calibri"/>
               </a:rPr>
-              <a:t>$11,424</a:t>
+              <a:t>$6,149</a:t>
             </a:r>
           </a:p>
         </p:txBody>
@@ -9223,7 +9223,7 @@
                 </a:solidFill>
                 <a:latin typeface="Calibri"/>
               </a:rPr>
-              <a:t>$4,244</a:t>
+              <a:t>$2,140</a:t>
             </a:r>
           </a:p>
         </p:txBody>
@@ -9293,7 +9293,7 @@
                 </a:solidFill>
                 <a:latin typeface="Calibri"/>
               </a:rPr>
-              <a:t>$-7,176</a:t>
+              <a:t>$-6,030</a:t>
             </a:r>
           </a:p>
         </p:txBody>
@@ -9328,7 +9328,7 @@
                 </a:solidFill>
                 <a:latin typeface="Calibri"/>
               </a:rPr>
-              <a:t>+$4,244  =  $2,932 net loss</a:t>
+              <a:t>+$2,140  =  $3,890 net loss</a:t>
             </a:r>
           </a:p>
         </p:txBody>
@@ -9443,7 +9443,7 @@
                 </a:solidFill>
                 <a:latin typeface="Calibri"/>
               </a:rPr>
-              <a:t>Control:    85.0% of group revenue from Whales</a:t>
+              <a:t>Control:    88.2% of group revenue from Whales</a:t>
             </a:r>
           </a:p>
         </p:txBody>
@@ -9478,7 +9478,7 @@
                 </a:solidFill>
                 <a:latin typeface="Calibri"/>
               </a:rPr>
-              <a:t>Treatment:  88.8% of group revenue from Whales</a:t>
+              <a:t>Treatment:  92.1% of group revenue from Whales</a:t>
             </a:r>
           </a:p>
         </p:txBody>
@@ -9926,7 +9926,7 @@
                 </a:solidFill>
                 <a:latin typeface="Calibri"/>
               </a:rPr>
-              <a:t>$17.03</a:t>
+              <a:t>$17.54</a:t>
             </a:r>
           </a:p>
         </p:txBody>
@@ -9996,7 +9996,7 @@
                 </a:solidFill>
                 <a:latin typeface="Calibri"/>
               </a:rPr>
-              <a:t>$22.08</a:t>
+              <a:t>$18.37</a:t>
             </a:r>
           </a:p>
         </p:txBody>
@@ -10016,7 +10016,7 @@
             <a:avLst/>
           </a:prstGeom>
           <a:solidFill>
-            <a:srgbClr val="2ECC71"/>
+            <a:srgbClr val="F39C12"/>
           </a:solidFill>
           <a:ln>
             <a:noFill/>
@@ -10074,7 +10074,7 @@
                 </a:solidFill>
                 <a:latin typeface="Calibri"/>
               </a:rPr>
-              <a:t>+30%</a:t>
+              <a:t>+5%</a:t>
             </a:r>
           </a:p>
         </p:txBody>
@@ -10267,7 +10267,7 @@
                 </a:solidFill>
                 <a:latin typeface="Calibri"/>
               </a:rPr>
-              <a:t>$13.76</a:t>
+              <a:t>$9.31</a:t>
             </a:r>
           </a:p>
         </p:txBody>
@@ -10337,7 +10337,7 @@
                 </a:solidFill>
                 <a:latin typeface="Calibri"/>
               </a:rPr>
-              <a:t>$12.69</a:t>
+              <a:t>$11.27</a:t>
             </a:r>
           </a:p>
         </p:txBody>
@@ -10415,7 +10415,7 @@
                 </a:solidFill>
                 <a:latin typeface="Calibri"/>
               </a:rPr>
-              <a:t>+-8%</a:t>
+              <a:t>+21%</a:t>
             </a:r>
           </a:p>
         </p:txBody>
@@ -10495,7 +10495,7 @@
                 </a:solidFill>
                 <a:latin typeface="Calibri"/>
               </a:rPr>
-              <a:t>iOS players responded -4x more strongly to the Royal Spin feature than Android players. Prioritise iOS in rollout targeting and marketing spend.</a:t>
+              <a:t>iOS players responded 0x more strongly to the Royal Spin feature than Android players. Prioritise iOS in rollout targeting and marketing spend.</a:t>
             </a:r>
           </a:p>
         </p:txBody>
@@ -10825,7 +10825,7 @@
                 </a:solidFill>
                 <a:latin typeface="Calibri"/>
               </a:rPr>
-              <a:t>25.73% T  vs  25.63% C</a:t>
+              <a:t>24.94% T  vs  25.11% C</a:t>
             </a:r>
           </a:p>
         </p:txBody>
@@ -11051,7 +11051,7 @@
                 </a:solidFill>
                 <a:latin typeface="Calibri"/>
               </a:rPr>
-              <a:t>25.57% T  vs  25.00% C</a:t>
+              <a:t>25.90% T  vs  24.90% C</a:t>
             </a:r>
           </a:p>
         </p:txBody>
@@ -11277,7 +11277,7 @@
                 </a:solidFill>
                 <a:latin typeface="Calibri"/>
               </a:rPr>
-              <a:t>21.98% T  vs  22.34% C</a:t>
+              <a:t>21.78% T  vs  22.15% C</a:t>
             </a:r>
           </a:p>
         </p:txBody>
@@ -11503,7 +11503,7 @@
                 </a:solidFill>
                 <a:latin typeface="Calibri"/>
               </a:rPr>
-              <a:t>10.8 T  vs  10.8 C</a:t>
+              <a:t>10.6 T  vs  10.7 C</a:t>
             </a:r>
           </a:p>
         </p:txBody>
@@ -11729,7 +11729,7 @@
                 </a:solidFill>
                 <a:latin typeface="Calibri"/>
               </a:rPr>
-              <a:t>47.71 T  vs  49.69 C</a:t>
+              <a:t>49.92 T  vs  49.72 C</a:t>
             </a:r>
           </a:p>
         </p:txBody>
@@ -11955,7 +11955,7 @@
                 </a:solidFill>
                 <a:latin typeface="Calibri"/>
               </a:rPr>
-              <a:t>$18.83 T  vs  $21.06 C</a:t>
+              <a:t>$9.99 T  vs  $14.26 C</a:t>
             </a:r>
           </a:p>
         </p:txBody>
@@ -12181,7 +12181,7 @@
                 </a:solidFill>
                 <a:latin typeface="Calibri"/>
               </a:rPr>
-              <a:t>88.8% T  vs  85.0% C</a:t>
+              <a:t>92.1% T  vs  88.2% C</a:t>
             </a:r>
           </a:p>
         </p:txBody>
@@ -12548,7 +12548,7 @@
                 </a:solidFill>
                 <a:latin typeface="Calibri"/>
               </a:rPr>
-              <a:t>VERDICT:  SHIP  —  Royal Spin delivers a statistically meaningful +16% ARPU lift with no engagement cost</a:t>
+              <a:t>VERDICT:  SHIP  —  Royal Spin delivers a statistically meaningful +10% ARPU lift with no engagement cost</a:t>
             </a:r>
           </a:p>
         </p:txBody>
@@ -12741,7 +12741,7 @@
                 </a:solidFill>
                 <a:latin typeface="Calibri"/>
               </a:rPr>
-              <a:t>•  Strongest signal: iOS Whales saw +30% ARPU and +30% segment ARPU</a:t>
+              <a:t>•  Strongest signal: iOS Whales saw +5% ARPU and +14% segment ARPU</a:t>
             </a:r>
           </a:p>
         </p:txBody>
@@ -12811,7 +12811,7 @@
                 </a:solidFill>
                 <a:latin typeface="Calibri"/>
               </a:rPr>
-              <a:t>•  10.61% Royal Token adoption driving 23% of Treatment revenue</a:t>
+              <a:t>•  2.00% Royal Token adoption driving 15% of Treatment revenue</a:t>
             </a:r>
           </a:p>
         </p:txBody>
@@ -13039,7 +13039,7 @@
                 </a:solidFill>
                 <a:latin typeface="Calibri"/>
               </a:rPr>
-              <a:t>•  Net Dolphin loss: $2,932 across the experiment cohort</a:t>
+              <a:t>•  Net Dolphin loss: $3,890 across the experiment cohort</a:t>
             </a:r>
           </a:p>
         </p:txBody>
@@ -13267,7 +13267,7 @@
                 </a:solidFill>
                 <a:latin typeface="Calibri"/>
               </a:rPr>
-              <a:t>•  Treatment revenue is 88.8% Whale-dependent vs 85.0% in Control</a:t>
+              <a:t>•  Treatment revenue is 92.1% Whale-dependent vs 88.2% in Control</a:t>
             </a:r>
           </a:p>
         </p:txBody>
@@ -13337,7 +13337,7 @@
                 </a:solidFill>
                 <a:latin typeface="Calibri"/>
               </a:rPr>
-              <a:t>•  Review Android performance separately — only +-8% ARPU lift</a:t>
+              <a:t>•  Review Android performance separately — only +21% ARPU lift</a:t>
             </a:r>
           </a:p>
         </p:txBody>

--- a/exports/royal_spin_ab_test.pptx
+++ b/exports/royal_spin_ab_test.pptx
@@ -3484,7 +3484,7 @@
                 </a:solidFill>
                 <a:latin typeface="Calibri"/>
               </a:rPr>
-              <a:t>+10%</a:t>
+              <a:t>+-8%</a:t>
             </a:r>
           </a:p>
         </p:txBody>
@@ -3519,7 +3519,7 @@
                 </a:solidFill>
                 <a:latin typeface="Calibri"/>
               </a:rPr>
-              <a:t>$14.08  →  $15.43</a:t>
+              <a:t>$14.94  →  $13.69</a:t>
             </a:r>
           </a:p>
         </p:txBody>
@@ -3853,7 +3853,7 @@
                 </a:solidFill>
                 <a:latin typeface="Calibri"/>
               </a:rPr>
-              <a:t>Headline Result — ARPU +10%</a:t>
+              <a:t>Headline Result — ARPU +-8%</a:t>
             </a:r>
           </a:p>
         </p:txBody>
@@ -5590,7 +5590,7 @@
                 </a:solidFill>
                 <a:latin typeface="Calibri"/>
               </a:rPr>
-              <a:t>Headline Result — ARPU +10%</a:t>
+              <a:t>Headline Result — ARPU +-8%</a:t>
             </a:r>
           </a:p>
         </p:txBody>
@@ -5740,7 +5740,7 @@
                 </a:solidFill>
                 <a:latin typeface="Calibri"/>
               </a:rPr>
-              <a:t>$15.43</a:t>
+              <a:t>$13.69</a:t>
             </a:r>
           </a:p>
         </p:txBody>
@@ -5775,7 +5775,7 @@
                 </a:solidFill>
                 <a:latin typeface="Calibri"/>
               </a:rPr>
-              <a:t>▲ +10%  vs $14.08</a:t>
+              <a:t>▼ +-8%  vs $14.94</a:t>
             </a:r>
           </a:p>
         </p:txBody>
@@ -5890,7 +5890,7 @@
                 </a:solidFill>
                 <a:latin typeface="Calibri"/>
               </a:rPr>
-              <a:t>3.79%</a:t>
+              <a:t>3.95%</a:t>
             </a:r>
           </a:p>
         </p:txBody>
@@ -5925,7 +5925,7 @@
                 </a:solidFill>
                 <a:latin typeface="Calibri"/>
               </a:rPr>
-              <a:t>▼ -0.10pp  vs 3.89%</a:t>
+              <a:t>▼ -0.17pp  vs 4.12%</a:t>
             </a:r>
           </a:p>
         </p:txBody>
@@ -6040,7 +6040,7 @@
                 </a:solidFill>
                 <a:latin typeface="Calibri"/>
               </a:rPr>
-              <a:t>3.11%</a:t>
+              <a:t>3.09%</a:t>
             </a:r>
           </a:p>
         </p:txBody>
@@ -6071,11 +6071,11 @@
             <a:r>
               <a:rPr sz="1300" b="1">
                 <a:solidFill>
-                  <a:srgbClr val="2ECC71"/>
-                </a:solidFill>
-                <a:latin typeface="Calibri"/>
-              </a:rPr>
-              <a:t>▲ +0.13pp  vs 2.98%</a:t>
+                  <a:srgbClr val="E74C3C"/>
+                </a:solidFill>
+                <a:latin typeface="Calibri"/>
+              </a:rPr>
+              <a:t>▼ -0.10pp  vs 3.19%</a:t>
             </a:r>
           </a:p>
         </p:txBody>
@@ -6190,7 +6190,7 @@
                 </a:solidFill>
                 <a:latin typeface="Calibri"/>
               </a:rPr>
-              <a:t>49.92</a:t>
+              <a:t>47.13</a:t>
             </a:r>
           </a:p>
         </p:txBody>
@@ -6221,11 +6221,11 @@
             <a:r>
               <a:rPr sz="1300" b="1">
                 <a:solidFill>
-                  <a:srgbClr val="2ECC71"/>
-                </a:solidFill>
-                <a:latin typeface="Calibri"/>
-              </a:rPr>
-              <a:t>▲ +0.20  vs 49.72</a:t>
+                  <a:srgbClr val="E74C3C"/>
+                </a:solidFill>
+                <a:latin typeface="Calibri"/>
+              </a:rPr>
+              <a:t>▼ -2.88  vs 50.01</a:t>
             </a:r>
           </a:p>
         </p:txBody>
@@ -6521,7 +6521,7 @@
                 </a:solidFill>
                 <a:latin typeface="Calibri"/>
               </a:rPr>
-              <a:t>25.11%</a:t>
+              <a:t>26.29%</a:t>
             </a:r>
           </a:p>
         </p:txBody>
@@ -6556,7 +6556,7 @@
                 </a:solidFill>
                 <a:latin typeface="Calibri"/>
               </a:rPr>
-              <a:t>24.90%</a:t>
+              <a:t>25.25%</a:t>
             </a:r>
           </a:p>
         </p:txBody>
@@ -6591,7 +6591,7 @@
                 </a:solidFill>
                 <a:latin typeface="Calibri"/>
               </a:rPr>
-              <a:t>22.15%</a:t>
+              <a:t>22.72%</a:t>
             </a:r>
           </a:p>
         </p:txBody>
@@ -6704,7 +6704,7 @@
                 </a:solidFill>
                 <a:latin typeface="Calibri"/>
               </a:rPr>
-              <a:t>24.94%</a:t>
+              <a:t>25.56%</a:t>
             </a:r>
           </a:p>
         </p:txBody>
@@ -6739,7 +6739,7 @@
                 </a:solidFill>
                 <a:latin typeface="Calibri"/>
               </a:rPr>
-              <a:t>25.90%</a:t>
+              <a:t>26.83%</a:t>
             </a:r>
           </a:p>
         </p:txBody>
@@ -6774,7 +6774,7 @@
                 </a:solidFill>
                 <a:latin typeface="Calibri"/>
               </a:rPr>
-              <a:t>21.78%</a:t>
+              <a:t>21.80%</a:t>
             </a:r>
           </a:p>
         </p:txBody>
@@ -6924,7 +6924,7 @@
                 </a:solidFill>
                 <a:latin typeface="Calibri"/>
               </a:rPr>
-              <a:t>Treatment players spent 10% more on average than Control, while session engagement remained identical. The ARPU lift is driven purely by monetisation, not playtime inflation.</a:t>
+              <a:t>Treatment players spent -8% more on average than Control, while session engagement remained identical. The ARPU lift is driven purely by monetisation, not playtime inflation.</a:t>
             </a:r>
           </a:p>
         </p:txBody>
@@ -7063,7 +7063,7 @@
                 </a:solidFill>
                 <a:latin typeface="Calibri"/>
               </a:rPr>
-              <a:t>2.00% of Treatment players adopted Royal Tokens — and contributed 15% of all Treatment revenue</a:t>
+              <a:t>1.96% of Treatment players adopted Royal Tokens — and contributed 15% of all Treatment revenue</a:t>
             </a:r>
           </a:p>
         </p:txBody>
@@ -7178,7 +7178,7 @@
                 </a:solidFill>
                 <a:latin typeface="Calibri"/>
               </a:rPr>
-              <a:t>2.00%</a:t>
+              <a:t>1.96%</a:t>
             </a:r>
           </a:p>
         </p:txBody>
@@ -7326,7 +7326,7 @@
                 </a:solidFill>
                 <a:latin typeface="Calibri"/>
               </a:rPr>
-              <a:t>$26,896</a:t>
+              <a:t>$24,017</a:t>
             </a:r>
           </a:p>
         </p:txBody>
@@ -7490,7 +7490,7 @@
         <p:spPr>
           <a:xfrm>
             <a:off x="6309360" y="2176272"/>
-            <a:ext cx="4196602" cy="502920"/>
+            <a:ext cx="4195120" cy="502920"/>
           </a:xfrm>
           <a:prstGeom prst="rect">
             <a:avLst/>
@@ -7532,7 +7532,7 @@
         </p:nvSpPr>
         <p:spPr>
           <a:xfrm>
-            <a:off x="10597402" y="2176272"/>
+            <a:off x="10595920" y="2176272"/>
             <a:ext cx="1371600" cy="502920"/>
           </a:xfrm>
           <a:prstGeom prst="rect">
@@ -7554,7 +7554,7 @@
                 </a:solidFill>
                 <a:latin typeface="Calibri"/>
               </a:rPr>
-              <a:t>85.0%  $152,294</a:t>
+              <a:t>85.0%  $135,638</a:t>
             </a:r>
           </a:p>
         </p:txBody>
@@ -7603,7 +7603,7 @@
         <p:spPr>
           <a:xfrm>
             <a:off x="6309360" y="3822192"/>
-            <a:ext cx="741157" cy="502920"/>
+            <a:ext cx="742639" cy="502920"/>
           </a:xfrm>
           <a:prstGeom prst="rect">
             <a:avLst/>
@@ -7645,7 +7645,7 @@
         </p:nvSpPr>
         <p:spPr>
           <a:xfrm>
-            <a:off x="7141957" y="3822192"/>
+            <a:off x="7143439" y="3822192"/>
             <a:ext cx="1371600" cy="502920"/>
           </a:xfrm>
           <a:prstGeom prst="rect">
@@ -7667,7 +7667,7 @@
                 </a:solidFill>
                 <a:latin typeface="Calibri"/>
               </a:rPr>
-              <a:t>15.0%  $26,896</a:t>
+              <a:t>15.0%  $24,017</a:t>
             </a:r>
           </a:p>
         </p:txBody>
@@ -7702,7 +7702,7 @@
                 </a:solidFill>
                 <a:latin typeface="Calibri"/>
               </a:rPr>
-              <a:t>Total Treatment Revenue: $179,190</a:t>
+              <a:t>Total Treatment Revenue: $159,655</a:t>
             </a:r>
           </a:p>
         </p:txBody>
@@ -8287,7 +8287,7 @@
                 </a:solidFill>
                 <a:latin typeface="Calibri"/>
               </a:rPr>
-              <a:t>$380.59</a:t>
+              <a:t>$389.81</a:t>
             </a:r>
           </a:p>
         </p:txBody>
@@ -8322,7 +8322,7 @@
                 </a:solidFill>
                 <a:latin typeface="Calibri"/>
               </a:rPr>
-              <a:t>$435.60</a:t>
+              <a:t>$414.86</a:t>
             </a:r>
           </a:p>
         </p:txBody>
@@ -8357,7 +8357,7 @@
                 </a:solidFill>
                 <a:latin typeface="Calibri"/>
               </a:rPr>
-              <a:t>+14.5%</a:t>
+              <a:t>+6.4%</a:t>
             </a:r>
           </a:p>
         </p:txBody>
@@ -8505,7 +8505,7 @@
                 </a:solidFill>
                 <a:latin typeface="Calibri"/>
               </a:rPr>
-              <a:t>$14.26</a:t>
+              <a:t>$22.16</a:t>
             </a:r>
           </a:p>
         </p:txBody>
@@ -8540,7 +8540,7 @@
                 </a:solidFill>
                 <a:latin typeface="Calibri"/>
               </a:rPr>
-              <a:t>$9.99</a:t>
+              <a:t>$12.62</a:t>
             </a:r>
           </a:p>
         </p:txBody>
@@ -8575,7 +8575,7 @@
                 </a:solidFill>
                 <a:latin typeface="Calibri"/>
               </a:rPr>
-              <a:t>-29.9%</a:t>
+              <a:t>-43.1%</a:t>
             </a:r>
           </a:p>
         </p:txBody>
@@ -8723,7 +8723,7 @@
                 </a:solidFill>
                 <a:latin typeface="Calibri"/>
               </a:rPr>
-              <a:t>$0.70</a:t>
+              <a:t>$0.49</a:t>
             </a:r>
           </a:p>
         </p:txBody>
@@ -8789,11 +8789,11 @@
             <a:r>
               <a:rPr sz="1300" b="0">
                 <a:solidFill>
-                  <a:srgbClr val="E74C3C"/>
-                </a:solidFill>
-                <a:latin typeface="Calibri"/>
-              </a:rPr>
-              <a:t>-20.0%</a:t>
+                  <a:srgbClr val="2ECC71"/>
+                </a:solidFill>
+                <a:latin typeface="Calibri"/>
+              </a:rPr>
+              <a:t>+14.3%</a:t>
             </a:r>
           </a:p>
         </p:txBody>
@@ -9083,7 +9083,7 @@
                 </a:solidFill>
                 <a:latin typeface="Calibri"/>
               </a:rPr>
-              <a:t>$12,179</a:t>
+              <a:t>$18,238</a:t>
             </a:r>
           </a:p>
         </p:txBody>
@@ -9188,7 +9188,7 @@
                 </a:solidFill>
                 <a:latin typeface="Calibri"/>
               </a:rPr>
-              <a:t>$6,149</a:t>
+              <a:t>$8,801</a:t>
             </a:r>
           </a:p>
         </p:txBody>
@@ -9223,7 +9223,7 @@
                 </a:solidFill>
                 <a:latin typeface="Calibri"/>
               </a:rPr>
-              <a:t>$2,140</a:t>
+              <a:t>$2,270</a:t>
             </a:r>
           </a:p>
         </p:txBody>
@@ -9293,7 +9293,7 @@
                 </a:solidFill>
                 <a:latin typeface="Calibri"/>
               </a:rPr>
-              <a:t>$-6,030</a:t>
+              <a:t>$-9,437</a:t>
             </a:r>
           </a:p>
         </p:txBody>
@@ -9328,7 +9328,7 @@
                 </a:solidFill>
                 <a:latin typeface="Calibri"/>
               </a:rPr>
-              <a:t>+$2,140  =  $3,890 net loss</a:t>
+              <a:t>+$2,270  =  $7,167 net loss</a:t>
             </a:r>
           </a:p>
         </p:txBody>
@@ -9443,7 +9443,7 @@
                 </a:solidFill>
                 <a:latin typeface="Calibri"/>
               </a:rPr>
-              <a:t>Control:    88.2% of group revenue from Whales</a:t>
+              <a:t>Control:    86.7% of group revenue from Whales</a:t>
             </a:r>
           </a:p>
         </p:txBody>
@@ -9478,7 +9478,7 @@
                 </a:solidFill>
                 <a:latin typeface="Calibri"/>
               </a:rPr>
-              <a:t>Treatment:  92.1% of group revenue from Whales</a:t>
+              <a:t>Treatment:  89.4% of group revenue from Whales</a:t>
             </a:r>
           </a:p>
         </p:txBody>
@@ -9926,7 +9926,7 @@
                 </a:solidFill>
                 <a:latin typeface="Calibri"/>
               </a:rPr>
-              <a:t>$17.54</a:t>
+              <a:t>$17.83</a:t>
             </a:r>
           </a:p>
         </p:txBody>
@@ -9996,7 +9996,7 @@
                 </a:solidFill>
                 <a:latin typeface="Calibri"/>
               </a:rPr>
-              <a:t>$18.37</a:t>
+              <a:t>$16.20</a:t>
             </a:r>
           </a:p>
         </p:txBody>
@@ -10074,7 +10074,7 @@
                 </a:solidFill>
                 <a:latin typeface="Calibri"/>
               </a:rPr>
-              <a:t>+5%</a:t>
+              <a:t>+-9%</a:t>
             </a:r>
           </a:p>
         </p:txBody>
@@ -10267,7 +10267,7 @@
                 </a:solidFill>
                 <a:latin typeface="Calibri"/>
               </a:rPr>
-              <a:t>$9.31</a:t>
+              <a:t>$10.88</a:t>
             </a:r>
           </a:p>
         </p:txBody>
@@ -10337,7 +10337,7 @@
                 </a:solidFill>
                 <a:latin typeface="Calibri"/>
               </a:rPr>
-              <a:t>$11.27</a:t>
+              <a:t>$10.18</a:t>
             </a:r>
           </a:p>
         </p:txBody>
@@ -10415,7 +10415,7 @@
                 </a:solidFill>
                 <a:latin typeface="Calibri"/>
               </a:rPr>
-              <a:t>+21%</a:t>
+              <a:t>+-6%</a:t>
             </a:r>
           </a:p>
         </p:txBody>
@@ -10495,7 +10495,7 @@
                 </a:solidFill>
                 <a:latin typeface="Calibri"/>
               </a:rPr>
-              <a:t>iOS players responded 0x more strongly to the Royal Spin feature than Android players. Prioritise iOS in rollout targeting and marketing spend.</a:t>
+              <a:t>iOS players responded 2x more strongly to the Royal Spin feature than Android players. Prioritise iOS in rollout targeting and marketing spend.</a:t>
             </a:r>
           </a:p>
         </p:txBody>
@@ -10825,7 +10825,7 @@
                 </a:solidFill>
                 <a:latin typeface="Calibri"/>
               </a:rPr>
-              <a:t>24.94% T  vs  25.11% C</a:t>
+              <a:t>25.56% T  vs  26.29% C</a:t>
             </a:r>
           </a:p>
         </p:txBody>
@@ -11051,7 +11051,7 @@
                 </a:solidFill>
                 <a:latin typeface="Calibri"/>
               </a:rPr>
-              <a:t>25.90% T  vs  24.90% C</a:t>
+              <a:t>26.83% T  vs  25.25% C</a:t>
             </a:r>
           </a:p>
         </p:txBody>
@@ -11277,7 +11277,7 @@
                 </a:solidFill>
                 <a:latin typeface="Calibri"/>
               </a:rPr>
-              <a:t>21.78% T  vs  22.15% C</a:t>
+              <a:t>21.80% T  vs  22.72% C</a:t>
             </a:r>
           </a:p>
         </p:txBody>
@@ -11503,7 +11503,7 @@
                 </a:solidFill>
                 <a:latin typeface="Calibri"/>
               </a:rPr>
-              <a:t>10.6 T  vs  10.7 C</a:t>
+              <a:t>10.8 T  vs  10.9 C</a:t>
             </a:r>
           </a:p>
         </p:txBody>
@@ -11729,7 +11729,7 @@
                 </a:solidFill>
                 <a:latin typeface="Calibri"/>
               </a:rPr>
-              <a:t>49.92 T  vs  49.72 C</a:t>
+              <a:t>47.13 T  vs  50.01 C</a:t>
             </a:r>
           </a:p>
         </p:txBody>
@@ -11955,7 +11955,7 @@
                 </a:solidFill>
                 <a:latin typeface="Calibri"/>
               </a:rPr>
-              <a:t>$9.99 T  vs  $14.26 C</a:t>
+              <a:t>$12.62 T  vs  $22.16 C</a:t>
             </a:r>
           </a:p>
         </p:txBody>
@@ -12181,7 +12181,7 @@
                 </a:solidFill>
                 <a:latin typeface="Calibri"/>
               </a:rPr>
-              <a:t>92.1% T  vs  88.2% C</a:t>
+              <a:t>89.4% T  vs  86.7% C</a:t>
             </a:r>
           </a:p>
         </p:txBody>
@@ -12548,7 +12548,7 @@
                 </a:solidFill>
                 <a:latin typeface="Calibri"/>
               </a:rPr>
-              <a:t>VERDICT:  SHIP  —  Royal Spin delivers a statistically meaningful +10% ARPU lift with no engagement cost</a:t>
+              <a:t>VERDICT:  SHIP  —  Royal Spin delivers a statistically meaningful +-8% ARPU lift with no engagement cost</a:t>
             </a:r>
           </a:p>
         </p:txBody>
@@ -12741,7 +12741,7 @@
                 </a:solidFill>
                 <a:latin typeface="Calibri"/>
               </a:rPr>
-              <a:t>•  Strongest signal: iOS Whales saw +5% ARPU and +14% segment ARPU</a:t>
+              <a:t>•  Strongest signal: iOS Whales saw +-9% ARPU and +6% segment ARPU</a:t>
             </a:r>
           </a:p>
         </p:txBody>
@@ -12811,7 +12811,7 @@
                 </a:solidFill>
                 <a:latin typeface="Calibri"/>
               </a:rPr>
-              <a:t>•  2.00% Royal Token adoption driving 15% of Treatment revenue</a:t>
+              <a:t>•  1.96% Royal Token adoption driving 15% of Treatment revenue</a:t>
             </a:r>
           </a:p>
         </p:txBody>
@@ -13039,7 +13039,7 @@
                 </a:solidFill>
                 <a:latin typeface="Calibri"/>
               </a:rPr>
-              <a:t>•  Net Dolphin loss: $3,890 across the experiment cohort</a:t>
+              <a:t>•  Net Dolphin loss: $7,167 across the experiment cohort</a:t>
             </a:r>
           </a:p>
         </p:txBody>
@@ -13267,7 +13267,7 @@
                 </a:solidFill>
                 <a:latin typeface="Calibri"/>
               </a:rPr>
-              <a:t>•  Treatment revenue is 92.1% Whale-dependent vs 88.2% in Control</a:t>
+              <a:t>•  Treatment revenue is 89.4% Whale-dependent vs 86.7% in Control</a:t>
             </a:r>
           </a:p>
         </p:txBody>
@@ -13337,7 +13337,7 @@
                 </a:solidFill>
                 <a:latin typeface="Calibri"/>
               </a:rPr>
-              <a:t>•  Review Android performance separately — only +21% ARPU lift</a:t>
+              <a:t>•  Review Android performance separately — only +-6% ARPU lift</a:t>
             </a:r>
           </a:p>
         </p:txBody>

--- a/exports/royal_spin_ab_test.pptx
+++ b/exports/royal_spin_ab_test.pptx
@@ -3484,7 +3484,7 @@
                 </a:solidFill>
                 <a:latin typeface="Calibri"/>
               </a:rPr>
-              <a:t>+-8%</a:t>
+              <a:t>+11%</a:t>
             </a:r>
           </a:p>
         </p:txBody>
@@ -3519,7 +3519,7 @@
                 </a:solidFill>
                 <a:latin typeface="Calibri"/>
               </a:rPr>
-              <a:t>$14.94  →  $13.69</a:t>
+              <a:t>$13.59  →  $15.15</a:t>
             </a:r>
           </a:p>
         </p:txBody>
@@ -3853,7 +3853,7 @@
                 </a:solidFill>
                 <a:latin typeface="Calibri"/>
               </a:rPr>
-              <a:t>Headline Result — ARPU +-8%</a:t>
+              <a:t>Headline Result — ARPU +11%</a:t>
             </a:r>
           </a:p>
         </p:txBody>
@@ -5590,7 +5590,7 @@
                 </a:solidFill>
                 <a:latin typeface="Calibri"/>
               </a:rPr>
-              <a:t>Headline Result — ARPU +-8%</a:t>
+              <a:t>Headline Result — ARPU +11%</a:t>
             </a:r>
           </a:p>
         </p:txBody>
@@ -5740,7 +5740,7 @@
                 </a:solidFill>
                 <a:latin typeface="Calibri"/>
               </a:rPr>
-              <a:t>$13.69</a:t>
+              <a:t>$15.15</a:t>
             </a:r>
           </a:p>
         </p:txBody>
@@ -5775,7 +5775,7 @@
                 </a:solidFill>
                 <a:latin typeface="Calibri"/>
               </a:rPr>
-              <a:t>▼ +-8%  vs $14.94</a:t>
+              <a:t>▲ +11%  vs $13.59</a:t>
             </a:r>
           </a:p>
         </p:txBody>
@@ -5890,7 +5890,7 @@
                 </a:solidFill>
                 <a:latin typeface="Calibri"/>
               </a:rPr>
-              <a:t>3.95%</a:t>
+              <a:t>4.07%</a:t>
             </a:r>
           </a:p>
         </p:txBody>
@@ -5921,11 +5921,11 @@
             <a:r>
               <a:rPr sz="1300" b="1">
                 <a:solidFill>
-                  <a:srgbClr val="E74C3C"/>
-                </a:solidFill>
-                <a:latin typeface="Calibri"/>
-              </a:rPr>
-              <a:t>▼ -0.17pp  vs 4.12%</a:t>
+                  <a:srgbClr val="2ECC71"/>
+                </a:solidFill>
+                <a:latin typeface="Calibri"/>
+              </a:rPr>
+              <a:t>▲ +0.10pp  vs 3.97%</a:t>
             </a:r>
           </a:p>
         </p:txBody>
@@ -6040,7 +6040,7 @@
                 </a:solidFill>
                 <a:latin typeface="Calibri"/>
               </a:rPr>
-              <a:t>3.09%</a:t>
+              <a:t>2.83%</a:t>
             </a:r>
           </a:p>
         </p:txBody>
@@ -6075,7 +6075,7 @@
                 </a:solidFill>
                 <a:latin typeface="Calibri"/>
               </a:rPr>
-              <a:t>▼ -0.10pp  vs 3.19%</a:t>
+              <a:t>▼ -0.33pp  vs 3.16%</a:t>
             </a:r>
           </a:p>
         </p:txBody>
@@ -6190,7 +6190,7 @@
                 </a:solidFill>
                 <a:latin typeface="Calibri"/>
               </a:rPr>
-              <a:t>47.13</a:t>
+              <a:t>49.52</a:t>
             </a:r>
           </a:p>
         </p:txBody>
@@ -6225,7 +6225,7 @@
                 </a:solidFill>
                 <a:latin typeface="Calibri"/>
               </a:rPr>
-              <a:t>▼ -2.88  vs 50.01</a:t>
+              <a:t>▼ -0.87  vs 50.39</a:t>
             </a:r>
           </a:p>
         </p:txBody>
@@ -6521,7 +6521,7 @@
                 </a:solidFill>
                 <a:latin typeface="Calibri"/>
               </a:rPr>
-              <a:t>26.29%</a:t>
+              <a:t>26.26%</a:t>
             </a:r>
           </a:p>
         </p:txBody>
@@ -6556,7 +6556,7 @@
                 </a:solidFill>
                 <a:latin typeface="Calibri"/>
               </a:rPr>
-              <a:t>25.25%</a:t>
+              <a:t>25.29%</a:t>
             </a:r>
           </a:p>
         </p:txBody>
@@ -6591,7 +6591,7 @@
                 </a:solidFill>
                 <a:latin typeface="Calibri"/>
               </a:rPr>
-              <a:t>22.72%</a:t>
+              <a:t>21.75%</a:t>
             </a:r>
           </a:p>
         </p:txBody>
@@ -6704,7 +6704,7 @@
                 </a:solidFill>
                 <a:latin typeface="Calibri"/>
               </a:rPr>
-              <a:t>25.56%</a:t>
+              <a:t>25.93%</a:t>
             </a:r>
           </a:p>
         </p:txBody>
@@ -6739,7 +6739,7 @@
                 </a:solidFill>
                 <a:latin typeface="Calibri"/>
               </a:rPr>
-              <a:t>26.83%</a:t>
+              <a:t>25.78%</a:t>
             </a:r>
           </a:p>
         </p:txBody>
@@ -6774,7 +6774,7 @@
                 </a:solidFill>
                 <a:latin typeface="Calibri"/>
               </a:rPr>
-              <a:t>21.80%</a:t>
+              <a:t>22.52%</a:t>
             </a:r>
           </a:p>
         </p:txBody>
@@ -6924,7 +6924,7 @@
                 </a:solidFill>
                 <a:latin typeface="Calibri"/>
               </a:rPr>
-              <a:t>Treatment players spent -8% more on average than Control, while session engagement remained identical. The ARPU lift is driven purely by monetisation, not playtime inflation.</a:t>
+              <a:t>Treatment players spent 11% more on average than Control, while session engagement remained identical. The ARPU lift is driven purely by monetisation, not playtime inflation.</a:t>
             </a:r>
           </a:p>
         </p:txBody>
@@ -7063,7 +7063,7 @@
                 </a:solidFill>
                 <a:latin typeface="Calibri"/>
               </a:rPr>
-              <a:t>1.96% of Treatment players adopted Royal Tokens — and contributed 15% of all Treatment revenue</a:t>
+              <a:t>2.12% of Treatment players adopted Royal Tokens — and contributed 15% of all Treatment revenue</a:t>
             </a:r>
           </a:p>
         </p:txBody>
@@ -7178,7 +7178,7 @@
                 </a:solidFill>
                 <a:latin typeface="Calibri"/>
               </a:rPr>
-              <a:t>1.96%</a:t>
+              <a:t>2.12%</a:t>
             </a:r>
           </a:p>
         </p:txBody>
@@ -7326,7 +7326,7 @@
                 </a:solidFill>
                 <a:latin typeface="Calibri"/>
               </a:rPr>
-              <a:t>$24,017</a:t>
+              <a:t>$27,146</a:t>
             </a:r>
           </a:p>
         </p:txBody>
@@ -7490,7 +7490,7 @@
         <p:spPr>
           <a:xfrm>
             <a:off x="6309360" y="2176272"/>
-            <a:ext cx="4195120" cy="502920"/>
+            <a:ext cx="4182282" cy="502920"/>
           </a:xfrm>
           <a:prstGeom prst="rect">
             <a:avLst/>
@@ -7532,7 +7532,7 @@
         </p:nvSpPr>
         <p:spPr>
           <a:xfrm>
-            <a:off x="10595920" y="2176272"/>
+            <a:off x="10583082" y="2176272"/>
             <a:ext cx="1371600" cy="502920"/>
           </a:xfrm>
           <a:prstGeom prst="rect">
@@ -7554,7 +7554,7 @@
                 </a:solidFill>
                 <a:latin typeface="Calibri"/>
               </a:rPr>
-              <a:t>85.0%  $135,638</a:t>
+              <a:t>84.7%  $150,226</a:t>
             </a:r>
           </a:p>
         </p:txBody>
@@ -7603,7 +7603,7 @@
         <p:spPr>
           <a:xfrm>
             <a:off x="6309360" y="3822192"/>
-            <a:ext cx="742639" cy="502920"/>
+            <a:ext cx="755477" cy="502920"/>
           </a:xfrm>
           <a:prstGeom prst="rect">
             <a:avLst/>
@@ -7645,7 +7645,7 @@
         </p:nvSpPr>
         <p:spPr>
           <a:xfrm>
-            <a:off x="7143439" y="3822192"/>
+            <a:off x="7156277" y="3822192"/>
             <a:ext cx="1371600" cy="502920"/>
           </a:xfrm>
           <a:prstGeom prst="rect">
@@ -7667,7 +7667,7 @@
                 </a:solidFill>
                 <a:latin typeface="Calibri"/>
               </a:rPr>
-              <a:t>15.0%  $24,017</a:t>
+              <a:t>15.3%  $27,146</a:t>
             </a:r>
           </a:p>
         </p:txBody>
@@ -7702,7 +7702,7 @@
                 </a:solidFill>
                 <a:latin typeface="Calibri"/>
               </a:rPr>
-              <a:t>Total Treatment Revenue: $159,655</a:t>
+              <a:t>Total Treatment Revenue: $177,372</a:t>
             </a:r>
           </a:p>
         </p:txBody>
@@ -8287,7 +8287,7 @@
                 </a:solidFill>
                 <a:latin typeface="Calibri"/>
               </a:rPr>
-              <a:t>$389.81</a:t>
+              <a:t>$361.81</a:t>
             </a:r>
           </a:p>
         </p:txBody>
@@ -8322,7 +8322,7 @@
                 </a:solidFill>
                 <a:latin typeface="Calibri"/>
               </a:rPr>
-              <a:t>$414.86</a:t>
+              <a:t>$416.04</a:t>
             </a:r>
           </a:p>
         </p:txBody>
@@ -8357,7 +8357,7 @@
                 </a:solidFill>
                 <a:latin typeface="Calibri"/>
               </a:rPr>
-              <a:t>+6.4%</a:t>
+              <a:t>+15.0%</a:t>
             </a:r>
           </a:p>
         </p:txBody>
@@ -8505,7 +8505,7 @@
                 </a:solidFill>
                 <a:latin typeface="Calibri"/>
               </a:rPr>
-              <a:t>$22.16</a:t>
+              <a:t>$13.86</a:t>
             </a:r>
           </a:p>
         </p:txBody>
@@ -8540,7 +8540,7 @@
                 </a:solidFill>
                 <a:latin typeface="Calibri"/>
               </a:rPr>
-              <a:t>$12.62</a:t>
+              <a:t>$13.72</a:t>
             </a:r>
           </a:p>
         </p:txBody>
@@ -8571,11 +8571,11 @@
             <a:r>
               <a:rPr sz="1300" b="0">
                 <a:solidFill>
-                  <a:srgbClr val="E74C3C"/>
-                </a:solidFill>
-                <a:latin typeface="Calibri"/>
-              </a:rPr>
-              <a:t>-43.1%</a:t>
+                  <a:srgbClr val="F39C12"/>
+                </a:solidFill>
+                <a:latin typeface="Calibri"/>
+              </a:rPr>
+              <a:t>-1.0%</a:t>
             </a:r>
           </a:p>
         </p:txBody>
@@ -8723,7 +8723,7 @@
                 </a:solidFill>
                 <a:latin typeface="Calibri"/>
               </a:rPr>
-              <a:t>$0.49</a:t>
+              <a:t>$0.59</a:t>
             </a:r>
           </a:p>
         </p:txBody>
@@ -8758,7 +8758,7 @@
                 </a:solidFill>
                 <a:latin typeface="Calibri"/>
               </a:rPr>
-              <a:t>$0.56</a:t>
+              <a:t>$0.40</a:t>
             </a:r>
           </a:p>
         </p:txBody>
@@ -8789,11 +8789,11 @@
             <a:r>
               <a:rPr sz="1300" b="0">
                 <a:solidFill>
-                  <a:srgbClr val="2ECC71"/>
-                </a:solidFill>
-                <a:latin typeface="Calibri"/>
-              </a:rPr>
-              <a:t>+14.3%</a:t>
+                  <a:srgbClr val="E74C3C"/>
+                </a:solidFill>
+                <a:latin typeface="Calibri"/>
+              </a:rPr>
+              <a:t>-32.2%</a:t>
             </a:r>
           </a:p>
         </p:txBody>
@@ -9083,7 +9083,7 @@
                 </a:solidFill>
                 <a:latin typeface="Calibri"/>
               </a:rPr>
-              <a:t>$18,238</a:t>
+              <a:t>$11,813</a:t>
             </a:r>
           </a:p>
         </p:txBody>
@@ -9188,7 +9188,7 @@
                 </a:solidFill>
                 <a:latin typeface="Calibri"/>
               </a:rPr>
-              <a:t>$8,801</a:t>
+              <a:t>$9,205</a:t>
             </a:r>
           </a:p>
         </p:txBody>
@@ -9223,7 +9223,7 @@
                 </a:solidFill>
                 <a:latin typeface="Calibri"/>
               </a:rPr>
-              <a:t>$2,270</a:t>
+              <a:t>$2,539</a:t>
             </a:r>
           </a:p>
         </p:txBody>
@@ -9293,7 +9293,7 @@
                 </a:solidFill>
                 <a:latin typeface="Calibri"/>
               </a:rPr>
-              <a:t>$-9,437</a:t>
+              <a:t>$-2,608</a:t>
             </a:r>
           </a:p>
         </p:txBody>
@@ -9328,7 +9328,7 @@
                 </a:solidFill>
                 <a:latin typeface="Calibri"/>
               </a:rPr>
-              <a:t>+$2,270  =  $7,167 net loss</a:t>
+              <a:t>+$2,539  =  $69 net loss</a:t>
             </a:r>
           </a:p>
         </p:txBody>
@@ -9443,7 +9443,7 @@
                 </a:solidFill>
                 <a:latin typeface="Calibri"/>
               </a:rPr>
-              <a:t>Control:    86.7% of group revenue from Whales</a:t>
+              <a:t>Control:    88.7% of group revenue from Whales</a:t>
             </a:r>
           </a:p>
         </p:txBody>
@@ -9478,7 +9478,7 @@
                 </a:solidFill>
                 <a:latin typeface="Calibri"/>
               </a:rPr>
-              <a:t>Treatment:  89.4% of group revenue from Whales</a:t>
+              <a:t>Treatment:  91.0% of group revenue from Whales</a:t>
             </a:r>
           </a:p>
         </p:txBody>
@@ -9926,7 +9926,7 @@
                 </a:solidFill>
                 <a:latin typeface="Calibri"/>
               </a:rPr>
-              <a:t>$17.83</a:t>
+              <a:t>$16.55</a:t>
             </a:r>
           </a:p>
         </p:txBody>
@@ -9996,7 +9996,7 @@
                 </a:solidFill>
                 <a:latin typeface="Calibri"/>
               </a:rPr>
-              <a:t>$16.20</a:t>
+              <a:t>$18.37</a:t>
             </a:r>
           </a:p>
         </p:txBody>
@@ -10074,7 +10074,7 @@
                 </a:solidFill>
                 <a:latin typeface="Calibri"/>
               </a:rPr>
-              <a:t>+-9%</a:t>
+              <a:t>+11%</a:t>
             </a:r>
           </a:p>
         </p:txBody>
@@ -10267,7 +10267,7 @@
                 </a:solidFill>
                 <a:latin typeface="Calibri"/>
               </a:rPr>
-              <a:t>$10.88</a:t>
+              <a:t>$9.66</a:t>
             </a:r>
           </a:p>
         </p:txBody>
@@ -10337,7 +10337,7 @@
                 </a:solidFill>
                 <a:latin typeface="Calibri"/>
               </a:rPr>
-              <a:t>$10.18</a:t>
+              <a:t>$10.88</a:t>
             </a:r>
           </a:p>
         </p:txBody>
@@ -10415,7 +10415,7 @@
                 </a:solidFill>
                 <a:latin typeface="Calibri"/>
               </a:rPr>
-              <a:t>+-6%</a:t>
+              <a:t>+13%</a:t>
             </a:r>
           </a:p>
         </p:txBody>
@@ -10495,7 +10495,7 @@
                 </a:solidFill>
                 <a:latin typeface="Calibri"/>
               </a:rPr>
-              <a:t>iOS players responded 2x more strongly to the Royal Spin feature than Android players. Prioritise iOS in rollout targeting and marketing spend.</a:t>
+              <a:t>iOS players responded 1x more strongly to the Royal Spin feature than Android players. Prioritise iOS in rollout targeting and marketing spend.</a:t>
             </a:r>
           </a:p>
         </p:txBody>
@@ -10825,7 +10825,7 @@
                 </a:solidFill>
                 <a:latin typeface="Calibri"/>
               </a:rPr>
-              <a:t>25.56% T  vs  26.29% C</a:t>
+              <a:t>25.93% T  vs  26.26% C</a:t>
             </a:r>
           </a:p>
         </p:txBody>
@@ -11051,7 +11051,7 @@
                 </a:solidFill>
                 <a:latin typeface="Calibri"/>
               </a:rPr>
-              <a:t>26.83% T  vs  25.25% C</a:t>
+              <a:t>25.78% T  vs  25.29% C</a:t>
             </a:r>
           </a:p>
         </p:txBody>
@@ -11277,7 +11277,7 @@
                 </a:solidFill>
                 <a:latin typeface="Calibri"/>
               </a:rPr>
-              <a:t>21.80% T  vs  22.72% C</a:t>
+              <a:t>22.52% T  vs  21.75% C</a:t>
             </a:r>
           </a:p>
         </p:txBody>
@@ -11312,7 +11312,7 @@
                 </a:solidFill>
                 <a:latin typeface="Calibri"/>
               </a:rPr>
-              <a:t>Slight dip — monitor</a:t>
+              <a:t>Slight positive trend</a:t>
             </a:r>
           </a:p>
         </p:txBody>
@@ -11503,7 +11503,7 @@
                 </a:solidFill>
                 <a:latin typeface="Calibri"/>
               </a:rPr>
-              <a:t>10.8 T  vs  10.9 C</a:t>
+              <a:t>10.8 T  vs  10.7 C</a:t>
             </a:r>
           </a:p>
         </p:txBody>
@@ -11729,7 +11729,7 @@
                 </a:solidFill>
                 <a:latin typeface="Calibri"/>
               </a:rPr>
-              <a:t>47.13 T  vs  50.01 C</a:t>
+              <a:t>49.52 T  vs  50.39 C</a:t>
             </a:r>
           </a:p>
         </p:txBody>
@@ -11955,7 +11955,7 @@
                 </a:solidFill>
                 <a:latin typeface="Calibri"/>
               </a:rPr>
-              <a:t>$12.62 T  vs  $22.16 C</a:t>
+              <a:t>$13.72 T  vs  $13.86 C</a:t>
             </a:r>
           </a:p>
         </p:txBody>
@@ -12181,7 +12181,7 @@
                 </a:solidFill>
                 <a:latin typeface="Calibri"/>
               </a:rPr>
-              <a:t>89.4% T  vs  86.7% C</a:t>
+              <a:t>91.0% T  vs  88.7% C</a:t>
             </a:r>
           </a:p>
         </p:txBody>
@@ -12548,7 +12548,7 @@
                 </a:solidFill>
                 <a:latin typeface="Calibri"/>
               </a:rPr>
-              <a:t>VERDICT:  SHIP  —  Royal Spin delivers a statistically meaningful +-8% ARPU lift with no engagement cost</a:t>
+              <a:t>VERDICT:  SHIP  —  Royal Spin delivers a statistically meaningful +11% ARPU lift with no engagement cost</a:t>
             </a:r>
           </a:p>
         </p:txBody>
@@ -12741,7 +12741,7 @@
                 </a:solidFill>
                 <a:latin typeface="Calibri"/>
               </a:rPr>
-              <a:t>•  Strongest signal: iOS Whales saw +-9% ARPU and +6% segment ARPU</a:t>
+              <a:t>•  Strongest signal: iOS Whales saw +11% ARPU and +15% segment ARPU</a:t>
             </a:r>
           </a:p>
         </p:txBody>
@@ -12811,7 +12811,7 @@
                 </a:solidFill>
                 <a:latin typeface="Calibri"/>
               </a:rPr>
-              <a:t>•  1.96% Royal Token adoption driving 15% of Treatment revenue</a:t>
+              <a:t>•  2.12% Royal Token adoption driving 15% of Treatment revenue</a:t>
             </a:r>
           </a:p>
         </p:txBody>
@@ -13039,7 +13039,7 @@
                 </a:solidFill>
                 <a:latin typeface="Calibri"/>
               </a:rPr>
-              <a:t>•  Net Dolphin loss: $7,167 across the experiment cohort</a:t>
+              <a:t>•  Net Dolphin loss: $69 across the experiment cohort</a:t>
             </a:r>
           </a:p>
         </p:txBody>
@@ -13267,7 +13267,7 @@
                 </a:solidFill>
                 <a:latin typeface="Calibri"/>
               </a:rPr>
-              <a:t>•  Treatment revenue is 89.4% Whale-dependent vs 86.7% in Control</a:t>
+              <a:t>•  Treatment revenue is 91.0% Whale-dependent vs 88.7% in Control</a:t>
             </a:r>
           </a:p>
         </p:txBody>
@@ -13337,7 +13337,7 @@
                 </a:solidFill>
                 <a:latin typeface="Calibri"/>
               </a:rPr>
-              <a:t>•  Review Android performance separately — only +-6% ARPU lift</a:t>
+              <a:t>•  Review Android performance separately — only +13% ARPU lift</a:t>
             </a:r>
           </a:p>
         </p:txBody>

--- a/exports/royal_spin_ab_test.pptx
+++ b/exports/royal_spin_ab_test.pptx
@@ -6823,7 +6823,7 @@
         <p:spPr>
           <a:xfrm>
             <a:off x="457200" y="4709160"/>
-            <a:ext cx="11274552" cy="1783080"/>
+            <a:ext cx="11274552" cy="1005840"/>
           </a:xfrm>
           <a:prstGeom prst="rect">
             <a:avLst/>
@@ -6868,6 +6868,156 @@
         <p:spPr>
           <a:xfrm>
             <a:off x="640080" y="4800600"/>
+            <a:ext cx="10908792" cy="320040"/>
+          </a:xfrm>
+          <a:prstGeom prst="rect">
+            <a:avLst/>
+          </a:prstGeom>
+          <a:noFill/>
+        </p:spPr>
+        <p:txBody>
+          <a:bodyPr wrap="square">
+            <a:spAutoFit/>
+          </a:bodyPr>
+          <a:lstStyle/>
+          <a:p>
+            <a:pPr algn="l"/>
+            <a:r>
+              <a:rPr sz="1100" b="1">
+                <a:solidFill>
+                  <a:srgbClr val="D4AF37"/>
+                </a:solidFill>
+                <a:latin typeface="Calibri"/>
+              </a:rPr>
+              <a:t>KEY TAKEAWAY</a:t>
+            </a:r>
+          </a:p>
+        </p:txBody>
+      </p:sp>
+      <p:sp>
+        <p:nvSpPr>
+          <p:cNvPr id="39" name="TextBox 38"/>
+          <p:cNvSpPr txBox="1"/>
+          <p:nvPr/>
+        </p:nvSpPr>
+        <p:spPr>
+          <a:xfrm>
+            <a:off x="640080" y="5102352"/>
+            <a:ext cx="10908792" cy="548640"/>
+          </a:xfrm>
+          <a:prstGeom prst="rect">
+            <a:avLst/>
+          </a:prstGeom>
+          <a:noFill/>
+        </p:spPr>
+        <p:txBody>
+          <a:bodyPr wrap="square">
+            <a:spAutoFit/>
+          </a:bodyPr>
+          <a:lstStyle/>
+          <a:p>
+            <a:pPr algn="l"/>
+            <a:r>
+              <a:rPr sz="1300" b="0">
+                <a:solidFill>
+                  <a:srgbClr val="FFFFFF"/>
+                </a:solidFill>
+                <a:latin typeface="Calibri"/>
+              </a:rPr>
+              <a:t>Treatment players spent 11% more on average than Control, while session engagement remained identical. The ARPU lift is driven purely by monetisation, not playtime inflation.</a:t>
+            </a:r>
+          </a:p>
+        </p:txBody>
+      </p:sp>
+      <p:sp>
+        <p:nvSpPr>
+          <p:cNvPr id="40" name="Rectangle 39"/>
+          <p:cNvSpPr/>
+          <p:nvPr/>
+        </p:nvSpPr>
+        <p:spPr>
+          <a:xfrm>
+            <a:off x="457200" y="5806440"/>
+            <a:ext cx="11274552" cy="868680"/>
+          </a:xfrm>
+          <a:prstGeom prst="rect">
+            <a:avLst/>
+          </a:prstGeom>
+          <a:solidFill>
+            <a:srgbClr val="1A1400"/>
+          </a:solidFill>
+          <a:ln w="19050">
+            <a:solidFill>
+              <a:srgbClr val="F39C12"/>
+            </a:solidFill>
+          </a:ln>
+        </p:spPr>
+        <p:style>
+          <a:lnRef idx="1">
+            <a:schemeClr val="accent1"/>
+          </a:lnRef>
+          <a:fillRef idx="3">
+            <a:schemeClr val="accent1"/>
+          </a:fillRef>
+          <a:effectRef idx="2">
+            <a:schemeClr val="accent1"/>
+          </a:effectRef>
+          <a:fontRef idx="minor">
+            <a:schemeClr val="lt1"/>
+          </a:fontRef>
+        </p:style>
+        <p:txBody>
+          <a:bodyPr rtlCol="0" anchor="ctr"/>
+          <a:lstStyle/>
+          <a:p>
+            <a:pPr algn="ctr"/>
+          </a:p>
+        </p:txBody>
+      </p:sp>
+      <p:sp>
+        <p:nvSpPr>
+          <p:cNvPr id="41" name="TextBox 40"/>
+          <p:cNvSpPr txBox="1"/>
+          <p:nvPr/>
+        </p:nvSpPr>
+        <p:spPr>
+          <a:xfrm>
+            <a:off x="640080" y="5870448"/>
+            <a:ext cx="3657600" cy="320040"/>
+          </a:xfrm>
+          <a:prstGeom prst="rect">
+            <a:avLst/>
+          </a:prstGeom>
+          <a:noFill/>
+        </p:spPr>
+        <p:txBody>
+          <a:bodyPr wrap="square">
+            <a:spAutoFit/>
+          </a:bodyPr>
+          <a:lstStyle/>
+          <a:p>
+            <a:pPr algn="l"/>
+            <a:r>
+              <a:rPr sz="1100" b="1">
+                <a:solidFill>
+                  <a:srgbClr val="F39C12"/>
+                </a:solidFill>
+                <a:latin typeface="Calibri"/>
+              </a:rPr>
+              <a:t>STATISTICAL VALIDITY</a:t>
+            </a:r>
+          </a:p>
+        </p:txBody>
+      </p:sp>
+      <p:sp>
+        <p:nvSpPr>
+          <p:cNvPr id="42" name="TextBox 41"/>
+          <p:cNvSpPr txBox="1"/>
+          <p:nvPr/>
+        </p:nvSpPr>
+        <p:spPr>
+          <a:xfrm>
+            <a:off x="640080" y="6172200"/>
             <a:ext cx="10908792" cy="411480"/>
           </a:xfrm>
           <a:prstGeom prst="rect">
@@ -6883,48 +7033,13 @@
           <a:p>
             <a:pPr algn="l"/>
             <a:r>
-              <a:rPr sz="1100" b="1">
-                <a:solidFill>
-                  <a:srgbClr val="D4AF37"/>
-                </a:solidFill>
-                <a:latin typeface="Calibri"/>
-              </a:rPr>
-              <a:t>KEY TAKEAWAY</a:t>
-            </a:r>
-          </a:p>
-        </p:txBody>
-      </p:sp>
-      <p:sp>
-        <p:nvSpPr>
-          <p:cNvPr id="39" name="TextBox 38"/>
-          <p:cNvSpPr txBox="1"/>
-          <p:nvPr/>
-        </p:nvSpPr>
-        <p:spPr>
-          <a:xfrm>
-            <a:off x="640080" y="5166360"/>
-            <a:ext cx="10908792" cy="1097280"/>
-          </a:xfrm>
-          <a:prstGeom prst="rect">
-            <a:avLst/>
-          </a:prstGeom>
-          <a:noFill/>
-        </p:spPr>
-        <p:txBody>
-          <a:bodyPr wrap="square">
-            <a:spAutoFit/>
-          </a:bodyPr>
-          <a:lstStyle/>
-          <a:p>
-            <a:pPr algn="l"/>
-            <a:r>
-              <a:rPr sz="1400" b="0">
-                <a:solidFill>
-                  <a:srgbClr val="FFFFFF"/>
-                </a:solidFill>
-                <a:latin typeface="Calibri"/>
-              </a:rPr>
-              <a:t>Treatment players spent 11% more on average than Control, while session engagement remained identical. The ARPU lift is driven purely by monetisation, not playtime inflation.</a:t>
+              <a:rPr sz="1100" b="0">
+                <a:solidFill>
+                  <a:srgbClr val="F2F2F2"/>
+                </a:solidFill>
+                <a:latin typeface="Calibri"/>
+              </a:rPr>
+              <a:t>ARPU: p=0.26, 95% CI ($-1.12, $+4.13)  |  Conversion: p=0.67  |  Note: high revenue skew (Whale outliers) inflates variance — CUPED would reduce it.</a:t>
             </a:r>
           </a:p>
         </p:txBody>
